--- a/slides/computerScience_day5.pptx
+++ b/slides/computerScience_day5.pptx
@@ -5,7 +5,7 @@
     <p:sldMasterId id="2147483660" r:id="rId1"/>
   </p:sldMasterIdLst>
   <p:notesMasterIdLst>
-    <p:notesMasterId r:id="rId9"/>
+    <p:notesMasterId r:id="rId11"/>
   </p:notesMasterIdLst>
   <p:sldIdLst>
     <p:sldId id="256" r:id="rId2"/>
@@ -13,8 +13,10 @@
     <p:sldId id="269" r:id="rId4"/>
     <p:sldId id="313" r:id="rId5"/>
     <p:sldId id="312" r:id="rId6"/>
-    <p:sldId id="311" r:id="rId7"/>
-    <p:sldId id="306" r:id="rId8"/>
+    <p:sldId id="314" r:id="rId7"/>
+    <p:sldId id="311" r:id="rId8"/>
+    <p:sldId id="306" r:id="rId9"/>
+    <p:sldId id="315" r:id="rId10"/>
   </p:sldIdLst>
   <p:sldSz cx="12192000" cy="6858000"/>
   <p:notesSz cx="6858000" cy="9144000"/>
@@ -203,7 +205,7 @@
           <a:p>
             <a:fld id="{29743A7E-303A-4EAA-864C-611EED392E65}" type="datetimeFigureOut">
               <a:rPr kumimoji="1" lang="ja-JP" altLang="en-US" smtClean="0"/>
-              <a:t>2025/5/13</a:t>
+              <a:t>2025/5/14</a:t>
             </a:fld>
             <a:endParaRPr kumimoji="1" lang="ja-JP" altLang="en-US"/>
           </a:p>
@@ -1490,7 +1492,7 @@
           <a:p>
             <a:r>
               <a:rPr kumimoji="1" lang="en-US" altLang="ja-JP"/>
-              <a:t>Day4</a:t>
+              <a:t>Day5</a:t>
             </a:r>
             <a:endParaRPr kumimoji="1" lang="ja-JP" altLang="en-US"/>
           </a:p>
@@ -1745,7 +1747,7 @@
           <a:p>
             <a:r>
               <a:rPr kumimoji="1" lang="en-US" altLang="ja-JP"/>
-              <a:t>Day4</a:t>
+              <a:t>Day5</a:t>
             </a:r>
             <a:endParaRPr kumimoji="1" lang="ja-JP" altLang="en-US"/>
           </a:p>
@@ -2457,7 +2459,7 @@
           <a:p>
             <a:r>
               <a:rPr kumimoji="1" lang="en-US" altLang="ja-JP"/>
-              <a:t>Day4</a:t>
+              <a:t>Day5</a:t>
             </a:r>
             <a:endParaRPr kumimoji="1" lang="ja-JP" altLang="en-US"/>
           </a:p>
@@ -2836,7 +2838,7 @@
           <a:p>
             <a:r>
               <a:rPr lang="en-US" altLang="ja-JP"/>
-              <a:t>Day4</a:t>
+              <a:t>Day5</a:t>
             </a:r>
             <a:endParaRPr lang="ja-JP" altLang="en-US" dirty="0"/>
           </a:p>
@@ -3343,7 +3345,7 @@
           <a:p>
             <a:r>
               <a:rPr kumimoji="1" lang="en-US" altLang="ja-JP"/>
-              <a:t>Day4</a:t>
+              <a:t>Day5</a:t>
             </a:r>
             <a:endParaRPr kumimoji="1" lang="ja-JP" altLang="en-US"/>
           </a:p>
@@ -3834,7 +3836,7 @@
           <a:p>
             <a:r>
               <a:rPr kumimoji="1" lang="en-US" altLang="ja-JP"/>
-              <a:t>Day4</a:t>
+              <a:t>Day5</a:t>
             </a:r>
             <a:endParaRPr kumimoji="1" lang="ja-JP" altLang="en-US"/>
           </a:p>
@@ -3990,7 +3992,7 @@
           <a:p>
             <a:r>
               <a:rPr kumimoji="1" lang="en-US" altLang="ja-JP"/>
-              <a:t>Day4</a:t>
+              <a:t>Day5</a:t>
             </a:r>
             <a:endParaRPr kumimoji="1" lang="ja-JP" altLang="en-US"/>
           </a:p>
@@ -4118,7 +4120,7 @@
           <a:p>
             <a:r>
               <a:rPr kumimoji="1" lang="en-US" altLang="ja-JP"/>
-              <a:t>Day4</a:t>
+              <a:t>Day5</a:t>
             </a:r>
             <a:endParaRPr kumimoji="1" lang="ja-JP" altLang="en-US"/>
           </a:p>
@@ -4476,7 +4478,7 @@
           <a:p>
             <a:r>
               <a:rPr kumimoji="1" lang="en-US" altLang="ja-JP"/>
-              <a:t>Day4</a:t>
+              <a:t>Day5</a:t>
             </a:r>
             <a:endParaRPr kumimoji="1" lang="ja-JP" altLang="en-US"/>
           </a:p>
@@ -4782,7 +4784,7 @@
           <a:p>
             <a:r>
               <a:rPr kumimoji="1" lang="en-US" altLang="ja-JP"/>
-              <a:t>Day4</a:t>
+              <a:t>Day5</a:t>
             </a:r>
             <a:endParaRPr kumimoji="1" lang="ja-JP" altLang="en-US"/>
           </a:p>
@@ -5097,7 +5099,7 @@
           <a:p>
             <a:r>
               <a:rPr lang="en-US" altLang="ja-JP"/>
-              <a:t>Day4</a:t>
+              <a:t>Day5</a:t>
             </a:r>
             <a:endParaRPr lang="ja-JP" altLang="en-US" dirty="0"/>
           </a:p>
@@ -5801,7 +5803,7 @@
             <p:ph idx="1"/>
             <p:extLst>
               <p:ext uri="{D42A27DB-BD31-4B8C-83A1-F6EECF244321}">
-                <p14:modId xmlns:p14="http://schemas.microsoft.com/office/powerpoint/2010/main" val="3254182371"/>
+                <p14:modId xmlns:p14="http://schemas.microsoft.com/office/powerpoint/2010/main" val="2490772027"/>
               </p:ext>
             </p:extLst>
           </p:nvPr>
@@ -6378,7 +6380,7 @@
                       </a:pPr>
                       <a:r>
                         <a:rPr kumimoji="1" lang="ja-JP" altLang="en-US" sz="1600" dirty="0"/>
-                        <a:t>＜宿題一回お休み！＞</a:t>
+                        <a:t>・・・・</a:t>
                       </a:r>
                     </a:p>
                   </a:txBody>
@@ -6860,7 +6862,7 @@
           <a:p>
             <a:r>
               <a:rPr kumimoji="1" lang="en-US" altLang="ja-JP"/>
-              <a:t>Day4</a:t>
+              <a:t>Day5</a:t>
             </a:r>
             <a:endParaRPr kumimoji="1" lang="ja-JP" altLang="en-US"/>
           </a:p>
@@ -7141,7 +7143,7 @@
           <a:p>
             <a:r>
               <a:rPr lang="en-US" altLang="ja-JP"/>
-              <a:t>Day4</a:t>
+              <a:t>Day5</a:t>
             </a:r>
             <a:endParaRPr lang="ja-JP" altLang="en-US" dirty="0"/>
           </a:p>
@@ -7240,7 +7242,7 @@
           <a:p>
             <a:r>
               <a:rPr lang="ja-JP" altLang="en-US" dirty="0"/>
-              <a:t>予習テキストで学んだ事</a:t>
+              <a:t>予習テキストで学んだ事と本日の課題</a:t>
             </a:r>
           </a:p>
         </p:txBody>
@@ -7332,7 +7334,7 @@
           <a:p>
             <a:r>
               <a:rPr lang="en-US" altLang="ja-JP"/>
-              <a:t>Day4</a:t>
+              <a:t>Day5</a:t>
             </a:r>
             <a:endParaRPr lang="ja-JP" altLang="en-US" dirty="0"/>
           </a:p>
@@ -7365,6 +7367,448 @@
               <a:t>4</a:t>
             </a:fld>
             <a:endParaRPr lang="ja-JP" altLang="en-US" dirty="0"/>
+          </a:p>
+        </p:txBody>
+      </p:sp>
+      <p:sp>
+        <p:nvSpPr>
+          <p:cNvPr id="2" name="四角形: 角を丸くする 1">
+            <a:extLst>
+              <a:ext uri="{FF2B5EF4-FFF2-40B4-BE49-F238E27FC236}">
+                <a16:creationId xmlns:a16="http://schemas.microsoft.com/office/drawing/2014/main" id="{BF80EE86-B3EA-CE77-D969-E24F8301163C}"/>
+              </a:ext>
+            </a:extLst>
+          </p:cNvPr>
+          <p:cNvSpPr/>
+          <p:nvPr/>
+        </p:nvSpPr>
+        <p:spPr>
+          <a:xfrm>
+            <a:off x="1242951" y="2382982"/>
+            <a:ext cx="4381994" cy="1666504"/>
+          </a:xfrm>
+          <a:prstGeom prst="roundRect">
+            <a:avLst/>
+          </a:prstGeom>
+        </p:spPr>
+        <p:style>
+          <a:lnRef idx="2">
+            <a:schemeClr val="accent1">
+              <a:shade val="15000"/>
+            </a:schemeClr>
+          </a:lnRef>
+          <a:fillRef idx="1">
+            <a:schemeClr val="accent1"/>
+          </a:fillRef>
+          <a:effectRef idx="0">
+            <a:schemeClr val="accent1"/>
+          </a:effectRef>
+          <a:fontRef idx="minor">
+            <a:schemeClr val="lt1"/>
+          </a:fontRef>
+        </p:style>
+        <p:txBody>
+          <a:bodyPr rtlCol="0" anchor="ctr"/>
+          <a:lstStyle/>
+          <a:p>
+            <a:pPr algn="just"/>
+            <a:r>
+              <a:rPr lang="ja-JP" altLang="en-US" dirty="0"/>
+              <a:t>数値計算、特に行列計算のためのライブラリで、</a:t>
+            </a:r>
+            <a:r>
+              <a:rPr lang="en-US" altLang="ja-JP" dirty="0"/>
+              <a:t>Python</a:t>
+            </a:r>
+            <a:r>
+              <a:rPr lang="ja-JP" altLang="en-US" dirty="0"/>
+              <a:t>のデフォルトの機能と比べて、配列などの値の処理が格段にやりやすくなるライブラリ。</a:t>
+            </a:r>
+            <a:endParaRPr kumimoji="1" lang="ja-JP" altLang="en-US" dirty="0"/>
+          </a:p>
+        </p:txBody>
+      </p:sp>
+      <p:sp>
+        <p:nvSpPr>
+          <p:cNvPr id="3" name="四角形: 角を丸くする 2">
+            <a:extLst>
+              <a:ext uri="{FF2B5EF4-FFF2-40B4-BE49-F238E27FC236}">
+                <a16:creationId xmlns:a16="http://schemas.microsoft.com/office/drawing/2014/main" id="{98B06063-D261-E94E-8E78-FB1C72689AFC}"/>
+              </a:ext>
+            </a:extLst>
+          </p:cNvPr>
+          <p:cNvSpPr/>
+          <p:nvPr/>
+        </p:nvSpPr>
+        <p:spPr>
+          <a:xfrm>
+            <a:off x="6444344" y="2382982"/>
+            <a:ext cx="4381994" cy="1666504"/>
+          </a:xfrm>
+          <a:prstGeom prst="roundRect">
+            <a:avLst/>
+          </a:prstGeom>
+        </p:spPr>
+        <p:style>
+          <a:lnRef idx="2">
+            <a:schemeClr val="accent5">
+              <a:shade val="15000"/>
+            </a:schemeClr>
+          </a:lnRef>
+          <a:fillRef idx="1">
+            <a:schemeClr val="accent5"/>
+          </a:fillRef>
+          <a:effectRef idx="0">
+            <a:schemeClr val="accent5"/>
+          </a:effectRef>
+          <a:fontRef idx="minor">
+            <a:schemeClr val="lt1"/>
+          </a:fontRef>
+        </p:style>
+        <p:txBody>
+          <a:bodyPr rtlCol="0" anchor="ctr"/>
+          <a:lstStyle/>
+          <a:p>
+            <a:pPr algn="just"/>
+            <a:r>
+              <a:rPr kumimoji="1" lang="ja-JP" altLang="en-US" dirty="0"/>
+              <a:t>単なる数値データ</a:t>
+            </a:r>
+            <a:r>
+              <a:rPr kumimoji="1" lang="en-US" altLang="ja-JP" dirty="0"/>
+              <a:t>(</a:t>
+            </a:r>
+            <a:r>
+              <a:rPr kumimoji="1" lang="ja-JP" altLang="en-US" dirty="0"/>
+              <a:t>配列・行列</a:t>
+            </a:r>
+            <a:r>
+              <a:rPr kumimoji="1" lang="en-US" altLang="ja-JP" dirty="0"/>
+              <a:t>)</a:t>
+            </a:r>
+            <a:r>
+              <a:rPr kumimoji="1" lang="ja-JP" altLang="en-US" dirty="0"/>
+              <a:t>を超えて、エクセルや関係データベースで管理するような複雑なデータの保持と処理を得意とするライブラリ。</a:t>
+            </a:r>
+          </a:p>
+        </p:txBody>
+      </p:sp>
+      <p:sp>
+        <p:nvSpPr>
+          <p:cNvPr id="11" name="コンテンツ プレースホルダー 7">
+            <a:extLst>
+              <a:ext uri="{FF2B5EF4-FFF2-40B4-BE49-F238E27FC236}">
+                <a16:creationId xmlns:a16="http://schemas.microsoft.com/office/drawing/2014/main" id="{9C9A734A-0E7F-8830-B27F-148363B16440}"/>
+              </a:ext>
+            </a:extLst>
+          </p:cNvPr>
+          <p:cNvSpPr txBox="1">
+            <a:spLocks/>
+          </p:cNvSpPr>
+          <p:nvPr/>
+        </p:nvSpPr>
+        <p:spPr>
+          <a:xfrm>
+            <a:off x="5160818" y="4509068"/>
+            <a:ext cx="5181600" cy="4351338"/>
+          </a:xfrm>
+          <a:prstGeom prst="rect">
+            <a:avLst/>
+          </a:prstGeom>
+        </p:spPr>
+        <p:txBody>
+          <a:bodyPr vert="horz" lIns="91440" tIns="45720" rIns="91440" bIns="45720" rtlCol="0">
+            <a:normAutofit/>
+          </a:bodyPr>
+          <a:lstStyle>
+            <a:lvl1pPr marL="228600" indent="-228600" algn="l" defTabSz="914400" rtl="0" eaLnBrk="1" latinLnBrk="0" hangingPunct="1">
+              <a:lnSpc>
+                <a:spcPct val="90000"/>
+              </a:lnSpc>
+              <a:spcBef>
+                <a:spcPts val="1000"/>
+              </a:spcBef>
+              <a:buFont typeface="Arial" panose="020B0604020202020204" pitchFamily="34" charset="0"/>
+              <a:buChar char="•"/>
+              <a:defRPr kumimoji="1" sz="2800" kern="1200">
+                <a:solidFill>
+                  <a:schemeClr val="tx1"/>
+                </a:solidFill>
+                <a:latin typeface="+mn-lt"/>
+                <a:ea typeface="+mn-ea"/>
+                <a:cs typeface="+mn-cs"/>
+              </a:defRPr>
+            </a:lvl1pPr>
+            <a:lvl2pPr marL="685800" indent="-228600" algn="l" defTabSz="914400" rtl="0" eaLnBrk="1" latinLnBrk="0" hangingPunct="1">
+              <a:lnSpc>
+                <a:spcPct val="90000"/>
+              </a:lnSpc>
+              <a:spcBef>
+                <a:spcPts val="500"/>
+              </a:spcBef>
+              <a:buFont typeface="Arial" panose="020B0604020202020204" pitchFamily="34" charset="0"/>
+              <a:buChar char="•"/>
+              <a:defRPr kumimoji="1" sz="2400" kern="1200">
+                <a:solidFill>
+                  <a:schemeClr val="tx1"/>
+                </a:solidFill>
+                <a:latin typeface="+mn-lt"/>
+                <a:ea typeface="+mn-ea"/>
+                <a:cs typeface="+mn-cs"/>
+              </a:defRPr>
+            </a:lvl2pPr>
+            <a:lvl3pPr marL="1143000" indent="-228600" algn="l" defTabSz="914400" rtl="0" eaLnBrk="1" latinLnBrk="0" hangingPunct="1">
+              <a:lnSpc>
+                <a:spcPct val="90000"/>
+              </a:lnSpc>
+              <a:spcBef>
+                <a:spcPts val="500"/>
+              </a:spcBef>
+              <a:buFont typeface="Arial" panose="020B0604020202020204" pitchFamily="34" charset="0"/>
+              <a:buChar char="•"/>
+              <a:defRPr kumimoji="1" sz="2000" kern="1200">
+                <a:solidFill>
+                  <a:schemeClr val="tx1"/>
+                </a:solidFill>
+                <a:latin typeface="+mn-lt"/>
+                <a:ea typeface="+mn-ea"/>
+                <a:cs typeface="+mn-cs"/>
+              </a:defRPr>
+            </a:lvl3pPr>
+            <a:lvl4pPr marL="1600200" indent="-228600" algn="l" defTabSz="914400" rtl="0" eaLnBrk="1" latinLnBrk="0" hangingPunct="1">
+              <a:lnSpc>
+                <a:spcPct val="90000"/>
+              </a:lnSpc>
+              <a:spcBef>
+                <a:spcPts val="500"/>
+              </a:spcBef>
+              <a:buFont typeface="Arial" panose="020B0604020202020204" pitchFamily="34" charset="0"/>
+              <a:buChar char="•"/>
+              <a:defRPr kumimoji="1" sz="1800" kern="1200">
+                <a:solidFill>
+                  <a:schemeClr val="tx1"/>
+                </a:solidFill>
+                <a:latin typeface="+mn-lt"/>
+                <a:ea typeface="+mn-ea"/>
+                <a:cs typeface="+mn-cs"/>
+              </a:defRPr>
+            </a:lvl4pPr>
+            <a:lvl5pPr marL="2057400" indent="-228600" algn="l" defTabSz="914400" rtl="0" eaLnBrk="1" latinLnBrk="0" hangingPunct="1">
+              <a:lnSpc>
+                <a:spcPct val="90000"/>
+              </a:lnSpc>
+              <a:spcBef>
+                <a:spcPts val="500"/>
+              </a:spcBef>
+              <a:buFont typeface="Arial" panose="020B0604020202020204" pitchFamily="34" charset="0"/>
+              <a:buChar char="•"/>
+              <a:defRPr kumimoji="1" sz="1800" kern="1200">
+                <a:solidFill>
+                  <a:schemeClr val="tx1"/>
+                </a:solidFill>
+                <a:latin typeface="+mn-lt"/>
+                <a:ea typeface="+mn-ea"/>
+                <a:cs typeface="+mn-cs"/>
+              </a:defRPr>
+            </a:lvl5pPr>
+            <a:lvl6pPr marL="2514600" indent="-228600" algn="l" defTabSz="914400" rtl="0" eaLnBrk="1" latinLnBrk="0" hangingPunct="1">
+              <a:lnSpc>
+                <a:spcPct val="90000"/>
+              </a:lnSpc>
+              <a:spcBef>
+                <a:spcPts val="500"/>
+              </a:spcBef>
+              <a:buFont typeface="Arial" panose="020B0604020202020204" pitchFamily="34" charset="0"/>
+              <a:buChar char="•"/>
+              <a:defRPr kumimoji="1" sz="1800" kern="1200">
+                <a:solidFill>
+                  <a:schemeClr val="tx1"/>
+                </a:solidFill>
+                <a:latin typeface="+mn-lt"/>
+                <a:ea typeface="+mn-ea"/>
+                <a:cs typeface="+mn-cs"/>
+              </a:defRPr>
+            </a:lvl6pPr>
+            <a:lvl7pPr marL="2971800" indent="-228600" algn="l" defTabSz="914400" rtl="0" eaLnBrk="1" latinLnBrk="0" hangingPunct="1">
+              <a:lnSpc>
+                <a:spcPct val="90000"/>
+              </a:lnSpc>
+              <a:spcBef>
+                <a:spcPts val="500"/>
+              </a:spcBef>
+              <a:buFont typeface="Arial" panose="020B0604020202020204" pitchFamily="34" charset="0"/>
+              <a:buChar char="•"/>
+              <a:defRPr kumimoji="1" sz="1800" kern="1200">
+                <a:solidFill>
+                  <a:schemeClr val="tx1"/>
+                </a:solidFill>
+                <a:latin typeface="+mn-lt"/>
+                <a:ea typeface="+mn-ea"/>
+                <a:cs typeface="+mn-cs"/>
+              </a:defRPr>
+            </a:lvl7pPr>
+            <a:lvl8pPr marL="3429000" indent="-228600" algn="l" defTabSz="914400" rtl="0" eaLnBrk="1" latinLnBrk="0" hangingPunct="1">
+              <a:lnSpc>
+                <a:spcPct val="90000"/>
+              </a:lnSpc>
+              <a:spcBef>
+                <a:spcPts val="500"/>
+              </a:spcBef>
+              <a:buFont typeface="Arial" panose="020B0604020202020204" pitchFamily="34" charset="0"/>
+              <a:buChar char="•"/>
+              <a:defRPr kumimoji="1" sz="1800" kern="1200">
+                <a:solidFill>
+                  <a:schemeClr val="tx1"/>
+                </a:solidFill>
+                <a:latin typeface="+mn-lt"/>
+                <a:ea typeface="+mn-ea"/>
+                <a:cs typeface="+mn-cs"/>
+              </a:defRPr>
+            </a:lvl8pPr>
+            <a:lvl9pPr marL="3886200" indent="-228600" algn="l" defTabSz="914400" rtl="0" eaLnBrk="1" latinLnBrk="0" hangingPunct="1">
+              <a:lnSpc>
+                <a:spcPct val="90000"/>
+              </a:lnSpc>
+              <a:spcBef>
+                <a:spcPts val="500"/>
+              </a:spcBef>
+              <a:buFont typeface="Arial" panose="020B0604020202020204" pitchFamily="34" charset="0"/>
+              <a:buChar char="•"/>
+              <a:defRPr kumimoji="1" sz="1800" kern="1200">
+                <a:solidFill>
+                  <a:schemeClr val="tx1"/>
+                </a:solidFill>
+                <a:latin typeface="+mn-lt"/>
+                <a:ea typeface="+mn-ea"/>
+                <a:cs typeface="+mn-cs"/>
+              </a:defRPr>
+            </a:lvl9pPr>
+          </a:lstStyle>
+          <a:p>
+            <a:r>
+              <a:rPr lang="en-US" altLang="ja-JP" dirty="0"/>
+              <a:t>Matplotlib</a:t>
+            </a:r>
+          </a:p>
+          <a:p>
+            <a:endParaRPr lang="ja-JP" altLang="en-US" dirty="0">
+              <a:latin typeface="system-ui"/>
+            </a:endParaRPr>
+          </a:p>
+        </p:txBody>
+      </p:sp>
+      <p:sp>
+        <p:nvSpPr>
+          <p:cNvPr id="12" name="四角形: 角を丸くする 11">
+            <a:extLst>
+              <a:ext uri="{FF2B5EF4-FFF2-40B4-BE49-F238E27FC236}">
+                <a16:creationId xmlns:a16="http://schemas.microsoft.com/office/drawing/2014/main" id="{FD2E653B-323D-5FA2-276A-6C68E3D7B2D1}"/>
+              </a:ext>
+            </a:extLst>
+          </p:cNvPr>
+          <p:cNvSpPr/>
+          <p:nvPr/>
+        </p:nvSpPr>
+        <p:spPr>
+          <a:xfrm>
+            <a:off x="3981203" y="5066425"/>
+            <a:ext cx="4381994" cy="1666504"/>
+          </a:xfrm>
+          <a:prstGeom prst="roundRect">
+            <a:avLst/>
+          </a:prstGeom>
+        </p:spPr>
+        <p:style>
+          <a:lnRef idx="2">
+            <a:schemeClr val="accent6">
+              <a:shade val="15000"/>
+            </a:schemeClr>
+          </a:lnRef>
+          <a:fillRef idx="1">
+            <a:schemeClr val="accent6"/>
+          </a:fillRef>
+          <a:effectRef idx="0">
+            <a:schemeClr val="accent6"/>
+          </a:effectRef>
+          <a:fontRef idx="minor">
+            <a:schemeClr val="lt1"/>
+          </a:fontRef>
+        </p:style>
+        <p:txBody>
+          <a:bodyPr rtlCol="0" anchor="ctr"/>
+          <a:lstStyle/>
+          <a:p>
+            <a:pPr algn="just"/>
+            <a:r>
+              <a:rPr kumimoji="1" lang="en-US" altLang="ja-JP" dirty="0"/>
+              <a:t>NumPy</a:t>
+            </a:r>
+            <a:r>
+              <a:rPr kumimoji="1" lang="ja-JP" altLang="en-US" dirty="0"/>
+              <a:t>ゃ</a:t>
+            </a:r>
+            <a:r>
+              <a:rPr kumimoji="1" lang="en-US" altLang="ja-JP" dirty="0"/>
+              <a:t>Pandas(</a:t>
+            </a:r>
+            <a:r>
+              <a:rPr kumimoji="1" lang="en-US" altLang="ja-JP" dirty="0" err="1"/>
+              <a:t>DataFrame</a:t>
+            </a:r>
+            <a:r>
+              <a:rPr kumimoji="1" lang="en-US" altLang="ja-JP" dirty="0"/>
+              <a:t>)</a:t>
+            </a:r>
+            <a:r>
+              <a:rPr kumimoji="1" lang="ja-JP" altLang="en-US" dirty="0"/>
+              <a:t>で表現されたデータをグラフとして可視化するためのライブラリ。おおよそ私達が考えつく様々なグラフ形式に対応。</a:t>
+            </a:r>
+          </a:p>
+        </p:txBody>
+      </p:sp>
+      <p:sp>
+        <p:nvSpPr>
+          <p:cNvPr id="13" name="矢印: 下 12">
+            <a:extLst>
+              <a:ext uri="{FF2B5EF4-FFF2-40B4-BE49-F238E27FC236}">
+                <a16:creationId xmlns:a16="http://schemas.microsoft.com/office/drawing/2014/main" id="{A5EA5EEA-38DA-0EE7-089F-EBD40D992157}"/>
+              </a:ext>
+            </a:extLst>
+          </p:cNvPr>
+          <p:cNvSpPr/>
+          <p:nvPr/>
+        </p:nvSpPr>
+        <p:spPr>
+          <a:xfrm>
+            <a:off x="5622966" y="4230111"/>
+            <a:ext cx="946068" cy="310553"/>
+          </a:xfrm>
+          <a:prstGeom prst="downArrow">
+            <a:avLst/>
+          </a:prstGeom>
+        </p:spPr>
+        <p:style>
+          <a:lnRef idx="2">
+            <a:schemeClr val="accent6">
+              <a:shade val="15000"/>
+            </a:schemeClr>
+          </a:lnRef>
+          <a:fillRef idx="1">
+            <a:schemeClr val="accent6"/>
+          </a:fillRef>
+          <a:effectRef idx="0">
+            <a:schemeClr val="accent6"/>
+          </a:effectRef>
+          <a:fontRef idx="minor">
+            <a:schemeClr val="lt1"/>
+          </a:fontRef>
+        </p:style>
+        <p:txBody>
+          <a:bodyPr rtlCol="0" anchor="ctr"/>
+          <a:lstStyle/>
+          <a:p>
+            <a:pPr algn="ctr"/>
+            <a:endParaRPr kumimoji="1" lang="ja-JP" altLang="en-US"/>
           </a:p>
         </p:txBody>
       </p:sp>
@@ -7575,7 +8019,7 @@
           <a:p>
             <a:r>
               <a:rPr lang="en-US" altLang="ja-JP"/>
-              <a:t>Day4</a:t>
+              <a:t>Day5</a:t>
             </a:r>
             <a:endParaRPr lang="ja-JP" altLang="en-US" dirty="0"/>
           </a:p>
@@ -7611,13 +8055,7 @@
   <p:cSld>
     <p:spTree>
       <p:nvGrpSpPr>
-        <p:cNvPr id="1" name="">
-          <a:extLst>
-            <a:ext uri="{FF2B5EF4-FFF2-40B4-BE49-F238E27FC236}">
-              <a16:creationId xmlns:a16="http://schemas.microsoft.com/office/drawing/2014/main" id="{A3953DF0-2AD1-7696-259C-7B8580FC4846}"/>
-            </a:ext>
-          </a:extLst>
-        </p:cNvPr>
+        <p:cNvPr id="1" name=""/>
         <p:cNvGrpSpPr/>
         <p:nvPr/>
       </p:nvGrpSpPr>
@@ -7631,10 +8069,10 @@
       </p:grpSpPr>
       <p:sp>
         <p:nvSpPr>
-          <p:cNvPr id="2" name="フッター プレースホルダー 1">
-            <a:extLst>
-              <a:ext uri="{FF2B5EF4-FFF2-40B4-BE49-F238E27FC236}">
-                <a16:creationId xmlns:a16="http://schemas.microsoft.com/office/drawing/2014/main" id="{17FAFD9B-4C0B-9EF1-5FFA-1FF6B1892E46}"/>
+          <p:cNvPr id="5" name="フッター プレースホルダー 4">
+            <a:extLst>
+              <a:ext uri="{FF2B5EF4-FFF2-40B4-BE49-F238E27FC236}">
+                <a16:creationId xmlns:a16="http://schemas.microsoft.com/office/drawing/2014/main" id="{68E886D1-E4AA-933F-A8BC-2E3D3A7F3058}"/>
               </a:ext>
             </a:extLst>
           </p:cNvPr>
@@ -7651,19 +8089,19 @@
           <a:lstStyle/>
           <a:p>
             <a:r>
-              <a:rPr kumimoji="1" lang="ja-JP" altLang="en-US"/>
+              <a:rPr lang="ja-JP" altLang="en-US"/>
               <a:t>情報科学ｃ</a:t>
             </a:r>
-            <a:endParaRPr kumimoji="1" lang="ja-JP" altLang="en-US" dirty="0"/>
-          </a:p>
-        </p:txBody>
-      </p:sp>
-      <p:sp>
-        <p:nvSpPr>
-          <p:cNvPr id="3" name="タイトル 2">
-            <a:extLst>
-              <a:ext uri="{FF2B5EF4-FFF2-40B4-BE49-F238E27FC236}">
-                <a16:creationId xmlns:a16="http://schemas.microsoft.com/office/drawing/2014/main" id="{61611AAF-3D0D-8B64-C9FF-CB319AFE7F47}"/>
+            <a:endParaRPr lang="ja-JP" altLang="en-US" dirty="0"/>
+          </a:p>
+        </p:txBody>
+      </p:sp>
+      <p:sp>
+        <p:nvSpPr>
+          <p:cNvPr id="7" name="タイトル 6">
+            <a:extLst>
+              <a:ext uri="{FF2B5EF4-FFF2-40B4-BE49-F238E27FC236}">
+                <a16:creationId xmlns:a16="http://schemas.microsoft.com/office/drawing/2014/main" id="{6329AF7C-0C77-1E28-D623-E6BC39856BC8}"/>
               </a:ext>
             </a:extLst>
           </p:cNvPr>
@@ -7680,41 +8118,18 @@
           <a:lstStyle/>
           <a:p>
             <a:r>
-              <a:rPr kumimoji="1" lang="en-US" altLang="ja-JP" sz="2800" dirty="0"/>
-              <a:t>[</a:t>
-            </a:r>
-            <a:r>
-              <a:rPr kumimoji="1" lang="en-US" altLang="ja-JP" sz="2800" dirty="0">
-                <a:solidFill>
-                  <a:schemeClr val="accent1"/>
-                </a:solidFill>
-              </a:rPr>
-              <a:t>18</a:t>
-            </a:r>
-            <a:r>
-              <a:rPr kumimoji="1" lang="en-US" altLang="ja-JP" sz="2800" dirty="0"/>
-              <a:t>-day05kk] </a:t>
-            </a:r>
-            <a:br>
-              <a:rPr kumimoji="1" lang="ja-JP" altLang="en-US" dirty="0"/>
-            </a:br>
-            <a:r>
-              <a:rPr kumimoji="1" lang="en-US" altLang="ja-JP" dirty="0"/>
-              <a:t>Matplotlib 16</a:t>
-            </a:r>
-            <a:r>
-              <a:rPr kumimoji="1" lang="ja-JP" altLang="en-US" dirty="0"/>
-              <a:t>本ノック</a:t>
-            </a:r>
-          </a:p>
-        </p:txBody>
-      </p:sp>
-      <p:sp>
-        <p:nvSpPr>
-          <p:cNvPr id="4" name="コンテンツ プレースホルダー 3">
-            <a:extLst>
-              <a:ext uri="{FF2B5EF4-FFF2-40B4-BE49-F238E27FC236}">
-                <a16:creationId xmlns:a16="http://schemas.microsoft.com/office/drawing/2014/main" id="{54A2E979-0E7F-5B1C-1282-C07F86B7ED28}"/>
+              <a:rPr lang="ja-JP" altLang="en-US" dirty="0"/>
+              <a:t>本日の内容に入る前に・・・</a:t>
+            </a:r>
+          </a:p>
+        </p:txBody>
+      </p:sp>
+      <p:sp>
+        <p:nvSpPr>
+          <p:cNvPr id="8" name="コンテンツ プレースホルダー 7">
+            <a:extLst>
+              <a:ext uri="{FF2B5EF4-FFF2-40B4-BE49-F238E27FC236}">
+                <a16:creationId xmlns:a16="http://schemas.microsoft.com/office/drawing/2014/main" id="{40A4A42C-5FC3-9B60-CBA2-558A655A40DA}"/>
               </a:ext>
             </a:extLst>
           </p:cNvPr>
@@ -7727,67 +8142,22 @@
         </p:nvSpPr>
         <p:spPr/>
         <p:txBody>
-          <a:bodyPr>
-            <a:normAutofit/>
-          </a:bodyPr>
-          <a:lstStyle/>
-          <a:p>
-            <a:r>
-              <a:rPr kumimoji="1" lang="ja-JP" altLang="en-US" dirty="0"/>
-              <a:t>お題</a:t>
-            </a:r>
-          </a:p>
-          <a:p>
-            <a:pPr lvl="1"/>
-            <a:r>
-              <a:rPr kumimoji="1" lang="ja-JP" altLang="en-US" dirty="0"/>
-              <a:t>講義課題として提出してもらいますが解答付き</a:t>
-            </a:r>
-            <a:r>
-              <a:rPr kumimoji="1" lang="en-US" altLang="ja-JP" dirty="0"/>
-              <a:t>N</a:t>
-            </a:r>
-            <a:r>
-              <a:rPr kumimoji="1" lang="ja-JP" altLang="en-US" dirty="0"/>
-              <a:t>本ノックです</a:t>
-            </a:r>
-          </a:p>
-          <a:p>
-            <a:pPr lvl="1"/>
+          <a:bodyPr/>
+          <a:lstStyle/>
+          <a:p>
             <a:r>
               <a:rPr lang="ja-JP" altLang="en-US" dirty="0"/>
-              <a:t>順に解説しながら進めます</a:t>
-            </a:r>
-          </a:p>
-          <a:p>
-            <a:pPr lvl="1"/>
-            <a:r>
-              <a:rPr kumimoji="1" lang="ja-JP" altLang="en-US" dirty="0"/>
-              <a:t>ソースコードを改変したりして理解を深めてください</a:t>
-            </a:r>
-          </a:p>
-          <a:p>
-            <a:pPr lvl="1"/>
-            <a:r>
-              <a:rPr kumimoji="1" lang="ja-JP" altLang="en-US" dirty="0"/>
-              <a:t>ノート最下部に自由課題コーナーがあるので、コードを改変して面白いものができたら、そこに追記してください。</a:t>
-            </a:r>
-          </a:p>
-          <a:p>
-            <a:r>
-              <a:rPr lang="ja-JP" altLang="en-US" dirty="0"/>
-              <a:t>発表：なし</a:t>
-            </a:r>
-            <a:endParaRPr kumimoji="1" lang="ja-JP" altLang="en-US" dirty="0"/>
-          </a:p>
-        </p:txBody>
-      </p:sp>
-      <p:sp>
-        <p:nvSpPr>
-          <p:cNvPr id="5" name="日付プレースホルダー 4">
-            <a:extLst>
-              <a:ext uri="{FF2B5EF4-FFF2-40B4-BE49-F238E27FC236}">
-                <a16:creationId xmlns:a16="http://schemas.microsoft.com/office/drawing/2014/main" id="{1E6EC982-1A89-389F-C924-7ED8328AB307}"/>
+              <a:t>似顔絵の振り返りをしましょう。</a:t>
+            </a:r>
+          </a:p>
+        </p:txBody>
+      </p:sp>
+      <p:sp>
+        <p:nvSpPr>
+          <p:cNvPr id="4" name="日付プレースホルダー 3">
+            <a:extLst>
+              <a:ext uri="{FF2B5EF4-FFF2-40B4-BE49-F238E27FC236}">
+                <a16:creationId xmlns:a16="http://schemas.microsoft.com/office/drawing/2014/main" id="{40CEF451-3839-F987-5BB8-CCC15EFF1700}"/>
               </a:ext>
             </a:extLst>
           </p:cNvPr>
@@ -7804,10 +8174,10 @@
           <a:lstStyle/>
           <a:p>
             <a:r>
-              <a:rPr kumimoji="1" lang="en-US" altLang="ja-JP"/>
-              <a:t>Day4</a:t>
-            </a:r>
-            <a:endParaRPr kumimoji="1" lang="ja-JP" altLang="en-US"/>
+              <a:rPr lang="en-US" altLang="ja-JP"/>
+              <a:t>Day5</a:t>
+            </a:r>
+            <a:endParaRPr lang="ja-JP" altLang="en-US" dirty="0"/>
           </a:p>
         </p:txBody>
       </p:sp>
@@ -7816,7 +8186,7 @@
           <p:cNvPr id="6" name="スライド番号プレースホルダー 5">
             <a:extLst>
               <a:ext uri="{FF2B5EF4-FFF2-40B4-BE49-F238E27FC236}">
-                <a16:creationId xmlns:a16="http://schemas.microsoft.com/office/drawing/2014/main" id="{3B1DE181-3A7C-2141-F754-2D466590CF3F}"/>
+                <a16:creationId xmlns:a16="http://schemas.microsoft.com/office/drawing/2014/main" id="{E5999C95-B9DC-6968-0B45-10E8ED24B240}"/>
               </a:ext>
             </a:extLst>
           </p:cNvPr>
@@ -7833,17 +8203,18 @@
           <a:lstStyle/>
           <a:p>
             <a:fld id="{B4DA0251-0B3B-4C1C-96DC-5D2833458AB2}" type="slidenum">
-              <a:rPr kumimoji="1" lang="ja-JP" altLang="en-US" smtClean="0"/>
+              <a:rPr lang="ja-JP" altLang="en-US" smtClean="0"/>
+              <a:pPr/>
               <a:t>6</a:t>
             </a:fld>
-            <a:endParaRPr kumimoji="1" lang="ja-JP" altLang="en-US"/>
+            <a:endParaRPr lang="ja-JP" altLang="en-US" dirty="0"/>
           </a:p>
         </p:txBody>
       </p:sp>
     </p:spTree>
     <p:extLst>
       <p:ext uri="{BB962C8B-B14F-4D97-AF65-F5344CB8AC3E}">
-        <p14:creationId xmlns:p14="http://schemas.microsoft.com/office/powerpoint/2010/main" val="831695699"/>
+        <p14:creationId xmlns:p14="http://schemas.microsoft.com/office/powerpoint/2010/main" val="1893337042"/>
       </p:ext>
     </p:extLst>
   </p:cSld>
@@ -7870,6 +8241,273 @@
   <p:cSld>
     <p:spTree>
       <p:nvGrpSpPr>
+        <p:cNvPr id="1" name="">
+          <a:extLst>
+            <a:ext uri="{FF2B5EF4-FFF2-40B4-BE49-F238E27FC236}">
+              <a16:creationId xmlns:a16="http://schemas.microsoft.com/office/drawing/2014/main" id="{A3953DF0-2AD1-7696-259C-7B8580FC4846}"/>
+            </a:ext>
+          </a:extLst>
+        </p:cNvPr>
+        <p:cNvGrpSpPr/>
+        <p:nvPr/>
+      </p:nvGrpSpPr>
+      <p:grpSpPr>
+        <a:xfrm>
+          <a:off x="0" y="0"/>
+          <a:ext cx="0" cy="0"/>
+          <a:chOff x="0" y="0"/>
+          <a:chExt cx="0" cy="0"/>
+        </a:xfrm>
+      </p:grpSpPr>
+      <p:sp>
+        <p:nvSpPr>
+          <p:cNvPr id="2" name="フッター プレースホルダー 1">
+            <a:extLst>
+              <a:ext uri="{FF2B5EF4-FFF2-40B4-BE49-F238E27FC236}">
+                <a16:creationId xmlns:a16="http://schemas.microsoft.com/office/drawing/2014/main" id="{17FAFD9B-4C0B-9EF1-5FFA-1FF6B1892E46}"/>
+              </a:ext>
+            </a:extLst>
+          </p:cNvPr>
+          <p:cNvSpPr>
+            <a:spLocks noGrp="1"/>
+          </p:cNvSpPr>
+          <p:nvPr>
+            <p:ph type="ftr" sz="quarter" idx="11"/>
+          </p:nvPr>
+        </p:nvSpPr>
+        <p:spPr/>
+        <p:txBody>
+          <a:bodyPr/>
+          <a:lstStyle/>
+          <a:p>
+            <a:r>
+              <a:rPr kumimoji="1" lang="ja-JP" altLang="en-US"/>
+              <a:t>情報科学ｃ</a:t>
+            </a:r>
+            <a:endParaRPr kumimoji="1" lang="ja-JP" altLang="en-US" dirty="0"/>
+          </a:p>
+        </p:txBody>
+      </p:sp>
+      <p:sp>
+        <p:nvSpPr>
+          <p:cNvPr id="3" name="タイトル 2">
+            <a:extLst>
+              <a:ext uri="{FF2B5EF4-FFF2-40B4-BE49-F238E27FC236}">
+                <a16:creationId xmlns:a16="http://schemas.microsoft.com/office/drawing/2014/main" id="{61611AAF-3D0D-8B64-C9FF-CB319AFE7F47}"/>
+              </a:ext>
+            </a:extLst>
+          </p:cNvPr>
+          <p:cNvSpPr>
+            <a:spLocks noGrp="1"/>
+          </p:cNvSpPr>
+          <p:nvPr>
+            <p:ph type="title"/>
+          </p:nvPr>
+        </p:nvSpPr>
+        <p:spPr/>
+        <p:txBody>
+          <a:bodyPr/>
+          <a:lstStyle/>
+          <a:p>
+            <a:r>
+              <a:rPr kumimoji="1" lang="en-US" altLang="ja-JP" sz="2800" dirty="0"/>
+              <a:t>[</a:t>
+            </a:r>
+            <a:r>
+              <a:rPr kumimoji="1" lang="en-US" altLang="ja-JP" sz="2800" dirty="0">
+                <a:solidFill>
+                  <a:schemeClr val="accent1"/>
+                </a:solidFill>
+              </a:rPr>
+              <a:t>18</a:t>
+            </a:r>
+            <a:r>
+              <a:rPr kumimoji="1" lang="en-US" altLang="ja-JP" sz="2800" dirty="0"/>
+              <a:t>-day05kk] </a:t>
+            </a:r>
+            <a:br>
+              <a:rPr kumimoji="1" lang="ja-JP" altLang="en-US" dirty="0"/>
+            </a:br>
+            <a:r>
+              <a:rPr kumimoji="1" lang="en-US" altLang="ja-JP" dirty="0"/>
+              <a:t>Matplotlib 16</a:t>
+            </a:r>
+            <a:r>
+              <a:rPr kumimoji="1" lang="ja-JP" altLang="en-US" dirty="0"/>
+              <a:t>本ノック</a:t>
+            </a:r>
+          </a:p>
+        </p:txBody>
+      </p:sp>
+      <p:sp>
+        <p:nvSpPr>
+          <p:cNvPr id="4" name="コンテンツ プレースホルダー 3">
+            <a:extLst>
+              <a:ext uri="{FF2B5EF4-FFF2-40B4-BE49-F238E27FC236}">
+                <a16:creationId xmlns:a16="http://schemas.microsoft.com/office/drawing/2014/main" id="{54A2E979-0E7F-5B1C-1282-C07F86B7ED28}"/>
+              </a:ext>
+            </a:extLst>
+          </p:cNvPr>
+          <p:cNvSpPr>
+            <a:spLocks noGrp="1"/>
+          </p:cNvSpPr>
+          <p:nvPr>
+            <p:ph idx="1"/>
+          </p:nvPr>
+        </p:nvSpPr>
+        <p:spPr/>
+        <p:txBody>
+          <a:bodyPr>
+            <a:normAutofit/>
+          </a:bodyPr>
+          <a:lstStyle/>
+          <a:p>
+            <a:r>
+              <a:rPr kumimoji="1" lang="ja-JP" altLang="en-US" dirty="0"/>
+              <a:t>お題</a:t>
+            </a:r>
+          </a:p>
+          <a:p>
+            <a:pPr lvl="1"/>
+            <a:r>
+              <a:rPr kumimoji="1" lang="ja-JP" altLang="en-US" dirty="0"/>
+              <a:t>講義課題として提出してもらいますが解答付き</a:t>
+            </a:r>
+            <a:r>
+              <a:rPr kumimoji="1" lang="en-US" altLang="ja-JP" dirty="0"/>
+              <a:t>N</a:t>
+            </a:r>
+            <a:r>
+              <a:rPr kumimoji="1" lang="ja-JP" altLang="en-US" dirty="0"/>
+              <a:t>本ノックです</a:t>
+            </a:r>
+          </a:p>
+          <a:p>
+            <a:pPr lvl="1"/>
+            <a:r>
+              <a:rPr lang="ja-JP" altLang="en-US" dirty="0"/>
+              <a:t>順に解説しながら進めます</a:t>
+            </a:r>
+          </a:p>
+          <a:p>
+            <a:pPr lvl="1"/>
+            <a:r>
+              <a:rPr kumimoji="1" lang="ja-JP" altLang="en-US" dirty="0"/>
+              <a:t>ソースコードを改変したりして理解を深めてください</a:t>
+            </a:r>
+          </a:p>
+          <a:p>
+            <a:pPr lvl="1"/>
+            <a:r>
+              <a:rPr kumimoji="1" lang="ja-JP" altLang="en-US" dirty="0"/>
+              <a:t>ノート最下部に自由課題コーナーがあるので、コードを改変して面白いものができたら、そこに追記してください。</a:t>
+            </a:r>
+          </a:p>
+          <a:p>
+            <a:r>
+              <a:rPr lang="ja-JP" altLang="en-US" dirty="0"/>
+              <a:t>発表：前へ出ての発表は無し</a:t>
+            </a:r>
+            <a:endParaRPr lang="en-US" altLang="ja-JP" dirty="0"/>
+          </a:p>
+          <a:p>
+            <a:pPr lvl="1"/>
+            <a:r>
+              <a:rPr lang="ja-JP" altLang="en-US" dirty="0"/>
+              <a:t>時間的に許せば、皆さんの作ったグラフを画像提出。</a:t>
+            </a:r>
+            <a:endParaRPr kumimoji="1" lang="ja-JP" altLang="en-US" dirty="0"/>
+          </a:p>
+        </p:txBody>
+      </p:sp>
+      <p:sp>
+        <p:nvSpPr>
+          <p:cNvPr id="5" name="日付プレースホルダー 4">
+            <a:extLst>
+              <a:ext uri="{FF2B5EF4-FFF2-40B4-BE49-F238E27FC236}">
+                <a16:creationId xmlns:a16="http://schemas.microsoft.com/office/drawing/2014/main" id="{1E6EC982-1A89-389F-C924-7ED8328AB307}"/>
+              </a:ext>
+            </a:extLst>
+          </p:cNvPr>
+          <p:cNvSpPr>
+            <a:spLocks noGrp="1"/>
+          </p:cNvSpPr>
+          <p:nvPr>
+            <p:ph type="dt" sz="half" idx="10"/>
+          </p:nvPr>
+        </p:nvSpPr>
+        <p:spPr/>
+        <p:txBody>
+          <a:bodyPr/>
+          <a:lstStyle/>
+          <a:p>
+            <a:r>
+              <a:rPr kumimoji="1" lang="en-US" altLang="ja-JP"/>
+              <a:t>Day5</a:t>
+            </a:r>
+            <a:endParaRPr kumimoji="1" lang="ja-JP" altLang="en-US"/>
+          </a:p>
+        </p:txBody>
+      </p:sp>
+      <p:sp>
+        <p:nvSpPr>
+          <p:cNvPr id="6" name="スライド番号プレースホルダー 5">
+            <a:extLst>
+              <a:ext uri="{FF2B5EF4-FFF2-40B4-BE49-F238E27FC236}">
+                <a16:creationId xmlns:a16="http://schemas.microsoft.com/office/drawing/2014/main" id="{3B1DE181-3A7C-2141-F754-2D466590CF3F}"/>
+              </a:ext>
+            </a:extLst>
+          </p:cNvPr>
+          <p:cNvSpPr>
+            <a:spLocks noGrp="1"/>
+          </p:cNvSpPr>
+          <p:nvPr>
+            <p:ph type="sldNum" sz="quarter" idx="12"/>
+          </p:nvPr>
+        </p:nvSpPr>
+        <p:spPr/>
+        <p:txBody>
+          <a:bodyPr/>
+          <a:lstStyle/>
+          <a:p>
+            <a:fld id="{B4DA0251-0B3B-4C1C-96DC-5D2833458AB2}" type="slidenum">
+              <a:rPr kumimoji="1" lang="ja-JP" altLang="en-US" smtClean="0"/>
+              <a:t>7</a:t>
+            </a:fld>
+            <a:endParaRPr kumimoji="1" lang="ja-JP" altLang="en-US"/>
+          </a:p>
+        </p:txBody>
+      </p:sp>
+    </p:spTree>
+    <p:extLst>
+      <p:ext uri="{BB962C8B-B14F-4D97-AF65-F5344CB8AC3E}">
+        <p14:creationId xmlns:p14="http://schemas.microsoft.com/office/powerpoint/2010/main" val="831695699"/>
+      </p:ext>
+    </p:extLst>
+  </p:cSld>
+  <p:clrMapOvr>
+    <a:masterClrMapping/>
+  </p:clrMapOvr>
+  <mc:AlternateContent xmlns:mc="http://schemas.openxmlformats.org/markup-compatibility/2006" xmlns:p14="http://schemas.microsoft.com/office/powerpoint/2010/main">
+    <mc:Choice Requires="p14">
+      <p:transition spd="med" p14:dur="700">
+        <p:fade/>
+      </p:transition>
+    </mc:Choice>
+    <mc:Fallback xmlns="">
+      <p:transition spd="med">
+        <p:fade/>
+      </p:transition>
+    </mc:Fallback>
+  </mc:AlternateContent>
+</p:sld>
+</file>
+
+<file path=ppt/slides/slide8.xml><?xml version="1.0" encoding="utf-8"?>
+<p:sld xmlns:a="http://schemas.openxmlformats.org/drawingml/2006/main" xmlns:r="http://schemas.openxmlformats.org/officeDocument/2006/relationships" xmlns:p="http://schemas.openxmlformats.org/presentationml/2006/main">
+  <p:cSld>
+    <p:spTree>
+      <p:nvGrpSpPr>
         <p:cNvPr id="1" name=""/>
         <p:cNvGrpSpPr/>
         <p:nvPr/>
@@ -7971,7 +8609,7 @@
           <a:p>
             <a:r>
               <a:rPr kumimoji="1" lang="en-US" altLang="ja-JP"/>
-              <a:t>Day4</a:t>
+              <a:t>Day5</a:t>
             </a:r>
             <a:endParaRPr kumimoji="1" lang="ja-JP" altLang="en-US"/>
           </a:p>
@@ -8029,7 +8667,7 @@
           <a:p>
             <a:fld id="{B4DA0251-0B3B-4C1C-96DC-5D2833458AB2}" type="slidenum">
               <a:rPr kumimoji="1" lang="ja-JP" altLang="en-US" smtClean="0"/>
-              <a:t>7</a:t>
+              <a:t>8</a:t>
             </a:fld>
             <a:endParaRPr kumimoji="1" lang="ja-JP" altLang="en-US"/>
           </a:p>
@@ -8049,7 +8687,7 @@
         </p:nvSpPr>
         <p:spPr>
           <a:xfrm>
-            <a:off x="6941975" y="2866807"/>
+            <a:off x="6941975" y="2614144"/>
             <a:ext cx="5962261" cy="3154710"/>
           </a:xfrm>
           <a:prstGeom prst="rect">
@@ -8068,6 +8706,42 @@
               <a:t>なし</a:t>
             </a:r>
             <a:endParaRPr kumimoji="1" lang="ja-JP" altLang="en-US" sz="19900" dirty="0"/>
+          </a:p>
+        </p:txBody>
+      </p:sp>
+      <p:sp>
+        <p:nvSpPr>
+          <p:cNvPr id="4" name="テキスト ボックス 3">
+            <a:extLst>
+              <a:ext uri="{FF2B5EF4-FFF2-40B4-BE49-F238E27FC236}">
+                <a16:creationId xmlns:a16="http://schemas.microsoft.com/office/drawing/2014/main" id="{9DE90F35-E408-B2FC-BB16-8522AFBEF49C}"/>
+              </a:ext>
+            </a:extLst>
+          </p:cNvPr>
+          <p:cNvSpPr txBox="1"/>
+          <p:nvPr/>
+        </p:nvSpPr>
+        <p:spPr>
+          <a:xfrm>
+            <a:off x="7507705" y="5506453"/>
+            <a:ext cx="4499811" cy="646331"/>
+          </a:xfrm>
+          <a:prstGeom prst="rect">
+            <a:avLst/>
+          </a:prstGeom>
+          <a:noFill/>
+        </p:spPr>
+        <p:txBody>
+          <a:bodyPr wrap="square" rtlCol="0">
+            <a:spAutoFit/>
+          </a:bodyPr>
+          <a:lstStyle/>
+          <a:p>
+            <a:pPr algn="r"/>
+            <a:r>
+              <a:rPr kumimoji="1" lang="ja-JP" altLang="en-US" sz="3600" dirty="0"/>
+              <a:t>ですが・・・・</a:t>
+            </a:r>
           </a:p>
         </p:txBody>
       </p:sp>
@@ -8151,6 +8825,58 @@
                             </p:childTnLst>
                           </p:cTn>
                         </p:par>
+                        <p:par>
+                          <p:cTn id="8" fill="hold">
+                            <p:stCondLst>
+                              <p:cond delay="500"/>
+                            </p:stCondLst>
+                            <p:childTnLst>
+                              <p:par>
+                                <p:cTn id="9" presetID="10" presetClass="entr" presetSubtype="0" fill="hold" nodeType="afterEffect">
+                                  <p:stCondLst>
+                                    <p:cond delay="0"/>
+                                  </p:stCondLst>
+                                  <p:childTnLst>
+                                    <p:set>
+                                      <p:cBhvr>
+                                        <p:cTn id="10" dur="1" fill="hold">
+                                          <p:stCondLst>
+                                            <p:cond delay="0"/>
+                                          </p:stCondLst>
+                                        </p:cTn>
+                                        <p:tgtEl>
+                                          <p:spTgt spid="4">
+                                            <p:txEl>
+                                              <p:pRg st="0" end="0"/>
+                                            </p:txEl>
+                                          </p:spTgt>
+                                        </p:tgtEl>
+                                        <p:attrNameLst>
+                                          <p:attrName>style.visibility</p:attrName>
+                                        </p:attrNameLst>
+                                      </p:cBhvr>
+                                      <p:to>
+                                        <p:strVal val="visible"/>
+                                      </p:to>
+                                    </p:set>
+                                    <p:animEffect transition="in" filter="fade">
+                                      <p:cBhvr>
+                                        <p:cTn id="11" dur="500"/>
+                                        <p:tgtEl>
+                                          <p:spTgt spid="4">
+                                            <p:txEl>
+                                              <p:pRg st="0" end="0"/>
+                                            </p:txEl>
+                                          </p:spTgt>
+                                        </p:tgtEl>
+                                      </p:cBhvr>
+                                    </p:animEffect>
+                                  </p:childTnLst>
+                                </p:cTn>
+                              </p:par>
+                            </p:childTnLst>
+                          </p:cTn>
+                        </p:par>
                       </p:childTnLst>
                     </p:cTn>
                   </p:par>
@@ -8179,6 +8905,281 @@
       <p:bldP spid="3" grpId="0"/>
     </p:bldLst>
   </p:timing>
+</p:sld>
+</file>
+
+<file path=ppt/slides/slide9.xml><?xml version="1.0" encoding="utf-8"?>
+<p:sld xmlns:a="http://schemas.openxmlformats.org/drawingml/2006/main" xmlns:r="http://schemas.openxmlformats.org/officeDocument/2006/relationships" xmlns:p="http://schemas.openxmlformats.org/presentationml/2006/main">
+  <p:cSld>
+    <p:spTree>
+      <p:nvGrpSpPr>
+        <p:cNvPr id="1" name=""/>
+        <p:cNvGrpSpPr/>
+        <p:nvPr/>
+      </p:nvGrpSpPr>
+      <p:grpSpPr>
+        <a:xfrm>
+          <a:off x="0" y="0"/>
+          <a:ext cx="0" cy="0"/>
+          <a:chOff x="0" y="0"/>
+          <a:chExt cx="0" cy="0"/>
+        </a:xfrm>
+      </p:grpSpPr>
+      <p:sp>
+        <p:nvSpPr>
+          <p:cNvPr id="5" name="フッター プレースホルダー 4">
+            <a:extLst>
+              <a:ext uri="{FF2B5EF4-FFF2-40B4-BE49-F238E27FC236}">
+                <a16:creationId xmlns:a16="http://schemas.microsoft.com/office/drawing/2014/main" id="{A29D4DA3-B08B-1F83-1C43-C87141623048}"/>
+              </a:ext>
+            </a:extLst>
+          </p:cNvPr>
+          <p:cNvSpPr>
+            <a:spLocks noGrp="1"/>
+          </p:cNvSpPr>
+          <p:nvPr>
+            <p:ph type="ftr" sz="quarter" idx="11"/>
+          </p:nvPr>
+        </p:nvSpPr>
+        <p:spPr/>
+        <p:txBody>
+          <a:bodyPr/>
+          <a:lstStyle/>
+          <a:p>
+            <a:r>
+              <a:rPr lang="ja-JP" altLang="en-US"/>
+              <a:t>情報科学ｃ</a:t>
+            </a:r>
+            <a:endParaRPr lang="ja-JP" altLang="en-US" dirty="0"/>
+          </a:p>
+        </p:txBody>
+      </p:sp>
+      <p:sp>
+        <p:nvSpPr>
+          <p:cNvPr id="7" name="タイトル 6">
+            <a:extLst>
+              <a:ext uri="{FF2B5EF4-FFF2-40B4-BE49-F238E27FC236}">
+                <a16:creationId xmlns:a16="http://schemas.microsoft.com/office/drawing/2014/main" id="{FEAA3361-FF3A-3FA4-9483-B889A3DC7DC8}"/>
+              </a:ext>
+            </a:extLst>
+          </p:cNvPr>
+          <p:cNvSpPr>
+            <a:spLocks noGrp="1"/>
+          </p:cNvSpPr>
+          <p:nvPr>
+            <p:ph type="title"/>
+          </p:nvPr>
+        </p:nvSpPr>
+        <p:spPr/>
+        <p:txBody>
+          <a:bodyPr/>
+          <a:lstStyle/>
+          <a:p>
+            <a:r>
+              <a:rPr lang="ja-JP" altLang="en-US" dirty="0"/>
+              <a:t>来週までに</a:t>
+            </a:r>
+          </a:p>
+        </p:txBody>
+      </p:sp>
+      <p:sp>
+        <p:nvSpPr>
+          <p:cNvPr id="8" name="コンテンツ プレースホルダー 7">
+            <a:extLst>
+              <a:ext uri="{FF2B5EF4-FFF2-40B4-BE49-F238E27FC236}">
+                <a16:creationId xmlns:a16="http://schemas.microsoft.com/office/drawing/2014/main" id="{0924782C-4763-16A6-B987-B784E344FA25}"/>
+              </a:ext>
+            </a:extLst>
+          </p:cNvPr>
+          <p:cNvSpPr>
+            <a:spLocks noGrp="1"/>
+          </p:cNvSpPr>
+          <p:nvPr>
+            <p:ph idx="1"/>
+          </p:nvPr>
+        </p:nvSpPr>
+        <p:spPr/>
+        <p:txBody>
+          <a:bodyPr/>
+          <a:lstStyle/>
+          <a:p>
+            <a:r>
+              <a:rPr lang="ja-JP" altLang="en-US" dirty="0"/>
+              <a:t>来週：講義内で</a:t>
+            </a:r>
+            <a:r>
+              <a:rPr lang="en-US" altLang="ja-JP" dirty="0"/>
+              <a:t>NumPy</a:t>
+            </a:r>
+            <a:r>
+              <a:rPr lang="ja-JP" altLang="en-US" dirty="0"/>
+              <a:t>、</a:t>
+            </a:r>
+            <a:r>
+              <a:rPr lang="en-US" altLang="ja-JP" dirty="0"/>
+              <a:t>Pandas</a:t>
+            </a:r>
+            <a:r>
+              <a:rPr lang="ja-JP" altLang="en-US" dirty="0"/>
+              <a:t>、</a:t>
+            </a:r>
+            <a:r>
+              <a:rPr lang="en-US" altLang="ja-JP" dirty="0"/>
+              <a:t>matplotlib</a:t>
+            </a:r>
+            <a:r>
+              <a:rPr lang="ja-JP" altLang="en-US" dirty="0"/>
+              <a:t>を使った演習</a:t>
+            </a:r>
+          </a:p>
+          <a:p>
+            <a:pPr lvl="1"/>
+            <a:r>
+              <a:rPr lang="ja-JP" altLang="en-US" dirty="0"/>
+              <a:t>その題材になりそうなデータを探しておいてください。</a:t>
+            </a:r>
+          </a:p>
+          <a:p>
+            <a:pPr lvl="2"/>
+            <a:r>
+              <a:rPr lang="en-US" altLang="ja-JP" dirty="0"/>
+              <a:t>E-stat: </a:t>
+            </a:r>
+            <a:r>
+              <a:rPr lang="ja-JP" altLang="en-US" dirty="0"/>
+              <a:t>政府統計</a:t>
+            </a:r>
+          </a:p>
+          <a:p>
+            <a:pPr lvl="2"/>
+            <a:r>
+              <a:rPr lang="en-US" altLang="ja-JP" dirty="0"/>
+              <a:t>E-gov</a:t>
+            </a:r>
+            <a:r>
+              <a:rPr lang="ja-JP" altLang="en-US" dirty="0"/>
+              <a:t> データポータル</a:t>
+            </a:r>
+          </a:p>
+          <a:p>
+            <a:pPr lvl="2"/>
+            <a:r>
+              <a:rPr lang="ja-JP" altLang="en-US" dirty="0"/>
+              <a:t>東京都オープンデータカタログ</a:t>
+            </a:r>
+          </a:p>
+          <a:p>
+            <a:pPr lvl="3"/>
+            <a:r>
+              <a:rPr lang="ja-JP" altLang="en-US" dirty="0"/>
+              <a:t>他の地方自治体も積極的にデータをオープンにしています。</a:t>
+            </a:r>
+          </a:p>
+          <a:p>
+            <a:pPr lvl="2"/>
+            <a:r>
+              <a:rPr lang="ja-JP" altLang="en-US" dirty="0"/>
+              <a:t>「オープンデータ　</a:t>
+            </a:r>
+            <a:r>
+              <a:rPr lang="en-US" altLang="ja-JP" dirty="0"/>
+              <a:t>pandas</a:t>
+            </a:r>
+            <a:r>
+              <a:rPr lang="ja-JP" altLang="en-US" dirty="0"/>
+              <a:t>」でググると色々とアイデアが出てきます</a:t>
+            </a:r>
+          </a:p>
+          <a:p>
+            <a:r>
+              <a:rPr lang="ja-JP" altLang="en-US"/>
+              <a:t>提出物はありませんが、ネタ探しはしておいてください。</a:t>
+            </a:r>
+            <a:endParaRPr lang="ja-JP" altLang="en-US" dirty="0"/>
+          </a:p>
+        </p:txBody>
+      </p:sp>
+      <p:sp>
+        <p:nvSpPr>
+          <p:cNvPr id="4" name="日付プレースホルダー 3">
+            <a:extLst>
+              <a:ext uri="{FF2B5EF4-FFF2-40B4-BE49-F238E27FC236}">
+                <a16:creationId xmlns:a16="http://schemas.microsoft.com/office/drawing/2014/main" id="{551ADF60-2B12-25F8-BD9F-CA41E68C3687}"/>
+              </a:ext>
+            </a:extLst>
+          </p:cNvPr>
+          <p:cNvSpPr>
+            <a:spLocks noGrp="1"/>
+          </p:cNvSpPr>
+          <p:nvPr>
+            <p:ph type="dt" sz="half" idx="10"/>
+          </p:nvPr>
+        </p:nvSpPr>
+        <p:spPr/>
+        <p:txBody>
+          <a:bodyPr/>
+          <a:lstStyle/>
+          <a:p>
+            <a:r>
+              <a:rPr lang="en-US" altLang="ja-JP"/>
+              <a:t>Day5</a:t>
+            </a:r>
+            <a:endParaRPr lang="ja-JP" altLang="en-US" dirty="0"/>
+          </a:p>
+        </p:txBody>
+      </p:sp>
+      <p:sp>
+        <p:nvSpPr>
+          <p:cNvPr id="6" name="スライド番号プレースホルダー 5">
+            <a:extLst>
+              <a:ext uri="{FF2B5EF4-FFF2-40B4-BE49-F238E27FC236}">
+                <a16:creationId xmlns:a16="http://schemas.microsoft.com/office/drawing/2014/main" id="{01CEF3A9-963C-4EEA-A2D0-ECC9ECECE6F7}"/>
+              </a:ext>
+            </a:extLst>
+          </p:cNvPr>
+          <p:cNvSpPr>
+            <a:spLocks noGrp="1"/>
+          </p:cNvSpPr>
+          <p:nvPr>
+            <p:ph type="sldNum" sz="quarter" idx="12"/>
+          </p:nvPr>
+        </p:nvSpPr>
+        <p:spPr/>
+        <p:txBody>
+          <a:bodyPr/>
+          <a:lstStyle/>
+          <a:p>
+            <a:fld id="{B4DA0251-0B3B-4C1C-96DC-5D2833458AB2}" type="slidenum">
+              <a:rPr lang="ja-JP" altLang="en-US" smtClean="0"/>
+              <a:pPr/>
+              <a:t>9</a:t>
+            </a:fld>
+            <a:endParaRPr lang="ja-JP" altLang="en-US" dirty="0"/>
+          </a:p>
+        </p:txBody>
+      </p:sp>
+    </p:spTree>
+    <p:extLst>
+      <p:ext uri="{BB962C8B-B14F-4D97-AF65-F5344CB8AC3E}">
+        <p14:creationId xmlns:p14="http://schemas.microsoft.com/office/powerpoint/2010/main" val="3970877597"/>
+      </p:ext>
+    </p:extLst>
+  </p:cSld>
+  <p:clrMapOvr>
+    <a:masterClrMapping/>
+  </p:clrMapOvr>
+  <mc:AlternateContent xmlns:mc="http://schemas.openxmlformats.org/markup-compatibility/2006" xmlns:p14="http://schemas.microsoft.com/office/powerpoint/2010/main">
+    <mc:Choice Requires="p14">
+      <p:transition spd="med" p14:dur="700">
+        <p:fade/>
+      </p:transition>
+    </mc:Choice>
+    <mc:Fallback xmlns="">
+      <p:transition spd="med">
+        <p:fade/>
+      </p:transition>
+    </mc:Fallback>
+  </mc:AlternateContent>
 </p:sld>
 </file>
 
